--- a/slides/RE024_Touch_Inspector_完整功能版.pptx
+++ b/slides/RE024_Touch_Inspector_完整功能版.pptx
@@ -6595,7 +6595,7 @@
       </p:sp>
       <p:pic>
         <p:nvPicPr>
-          <p:cNvPr id="6" name="Picture 5" descr="window.png"/>
+          <p:cNvPr id="6" name="Picture 5" descr="04_raw_ff01.png"/>
           <p:cNvPicPr>
             <a:picLocks noChangeAspect="1"/>
           </p:cNvPicPr>
@@ -6609,8 +6609,8 @@
         </p:blipFill>
         <p:spPr>
           <a:xfrm>
-            <a:off x="457200" y="1867205"/>
-            <a:ext cx="6309360" cy="4037990"/>
+            <a:off x="457200" y="2215205"/>
+            <a:ext cx="6309360" cy="3341989"/>
           </a:xfrm>
           <a:prstGeom prst="rect">
             <a:avLst/>
@@ -7168,7 +7168,7 @@
       </p:sp>
       <p:pic>
         <p:nvPicPr>
-          <p:cNvPr id="6" name="Picture 5" descr="window.png"/>
+          <p:cNvPr id="6" name="Picture 5" descr="06_canvas_detail.png"/>
           <p:cNvPicPr>
             <a:picLocks noChangeAspect="1"/>
           </p:cNvPicPr>
@@ -7182,8 +7182,8 @@
         </p:blipFill>
         <p:spPr>
           <a:xfrm>
-            <a:off x="457200" y="1867205"/>
-            <a:ext cx="6309360" cy="4037990"/>
+            <a:off x="457200" y="1544651"/>
+            <a:ext cx="6309360" cy="4683097"/>
           </a:xfrm>
           <a:prstGeom prst="rect">
             <a:avLst/>
@@ -7442,7 +7442,7 @@
       </p:sp>
       <p:pic>
         <p:nvPicPr>
-          <p:cNvPr id="6" name="Picture 5" descr="differ.png"/>
+          <p:cNvPr id="6" name="Picture 5" descr="07_differ.png"/>
           <p:cNvPicPr>
             <a:picLocks noChangeAspect="1"/>
           </p:cNvPicPr>
@@ -7456,8 +7456,8 @@
         </p:blipFill>
         <p:spPr>
           <a:xfrm>
-            <a:off x="5486400" y="1867205"/>
-            <a:ext cx="6309360" cy="4037990"/>
+            <a:off x="5486400" y="2215205"/>
+            <a:ext cx="6309360" cy="3341989"/>
           </a:xfrm>
           <a:prstGeom prst="rect">
             <a:avLst/>

--- a/slides/RE024_Touch_Inspector_完整功能版.pptx
+++ b/slides/RE024_Touch_Inspector_完整功能版.pptx
@@ -3528,7 +3528,7 @@
       </p:sp>
       <p:pic>
         <p:nvPicPr>
-          <p:cNvPr id="6" name="Picture 5" descr="record.png"/>
+          <p:cNvPr id="6" name="Picture 5" descr="08_record.png"/>
           <p:cNvPicPr>
             <a:picLocks noChangeAspect="1"/>
           </p:cNvPicPr>
@@ -3542,8 +3542,8 @@
         </p:blipFill>
         <p:spPr>
           <a:xfrm>
-            <a:off x="457200" y="2568404"/>
-            <a:ext cx="6309360" cy="2635591"/>
+            <a:off x="457200" y="2990731"/>
+            <a:ext cx="6309360" cy="1790938"/>
           </a:xfrm>
           <a:prstGeom prst="rect">
             <a:avLst/>
@@ -6031,7 +6031,7 @@
       </p:sp>
       <p:pic>
         <p:nvPicPr>
-          <p:cNvPr id="6" name="Picture 5" descr="window.png"/>
+          <p:cNvPr id="6" name="Picture 5" descr="02_monitor_modes.png"/>
           <p:cNvPicPr>
             <a:picLocks noChangeAspect="1"/>
           </p:cNvPicPr>
@@ -6045,8 +6045,8 @@
         </p:blipFill>
         <p:spPr>
           <a:xfrm>
-            <a:off x="457200" y="1867205"/>
-            <a:ext cx="6309360" cy="4037990"/>
+            <a:off x="457200" y="3294697"/>
+            <a:ext cx="6309360" cy="1183005"/>
           </a:xfrm>
           <a:prstGeom prst="rect">
             <a:avLst/>
